--- a/Lectures/20250717 假伯濕還是喬治汝卡濕/20250717 假伯濕還是喬治汝卡濕.pptx
+++ b/Lectures/20250717 假伯濕還是喬治汝卡濕/20250717 假伯濕還是喬治汝卡濕.pptx
@@ -272,7 +272,7 @@
           <a:p>
             <a:fld id="{39300388-7A7F-6140-BD31-ECC958CE6EBB}" type="datetimeFigureOut">
               <a:rPr kumimoji="1" lang="zh-TW" altLang="en-US" smtClean="0"/>
-              <a:t>2025/7/16</a:t>
+              <a:t>2025/7/17</a:t>
             </a:fld>
             <a:endParaRPr kumimoji="1" lang="zh-TW" altLang="en-US"/>
           </a:p>
@@ -385,7 +385,7 @@
           <a:p>
             <a:fld id="{39300388-7A7F-6140-BD31-ECC958CE6EBB}" type="datetimeFigureOut">
               <a:rPr kumimoji="1" lang="zh-TW" altLang="en-US" smtClean="0"/>
-              <a:t>2025/7/16</a:t>
+              <a:t>2025/7/17</a:t>
             </a:fld>
             <a:endParaRPr kumimoji="1" lang="zh-TW" altLang="en-US"/>
           </a:p>
@@ -696,7 +696,7 @@
           <a:p>
             <a:fld id="{39300388-7A7F-6140-BD31-ECC958CE6EBB}" type="datetimeFigureOut">
               <a:rPr kumimoji="1" lang="zh-TW" altLang="en-US" smtClean="0"/>
-              <a:t>2025/7/16</a:t>
+              <a:t>2025/7/17</a:t>
             </a:fld>
             <a:endParaRPr kumimoji="1" lang="zh-TW" altLang="en-US"/>
           </a:p>
@@ -987,7 +987,7 @@
           <a:p>
             <a:fld id="{39300388-7A7F-6140-BD31-ECC958CE6EBB}" type="datetimeFigureOut">
               <a:rPr kumimoji="1" lang="zh-TW" altLang="en-US" smtClean="0"/>
-              <a:t>2025/7/16</a:t>
+              <a:t>2025/7/17</a:t>
             </a:fld>
             <a:endParaRPr kumimoji="1" lang="zh-TW" altLang="en-US"/>
           </a:p>
@@ -1185,7 +1185,7 @@
           <a:p>
             <a:fld id="{39300388-7A7F-6140-BD31-ECC958CE6EBB}" type="datetimeFigureOut">
               <a:rPr kumimoji="1" lang="zh-TW" altLang="en-US" smtClean="0"/>
-              <a:t>2025/7/16</a:t>
+              <a:t>2025/7/17</a:t>
             </a:fld>
             <a:endParaRPr kumimoji="1" lang="zh-TW" altLang="en-US"/>
           </a:p>
@@ -1393,7 +1393,7 @@
           <a:p>
             <a:fld id="{39300388-7A7F-6140-BD31-ECC958CE6EBB}" type="datetimeFigureOut">
               <a:rPr kumimoji="1" lang="zh-TW" altLang="en-US" smtClean="0"/>
-              <a:t>2025/7/16</a:t>
+              <a:t>2025/7/17</a:t>
             </a:fld>
             <a:endParaRPr kumimoji="1" lang="zh-TW" altLang="en-US"/>
           </a:p>
@@ -1591,7 +1591,7 @@
           <a:p>
             <a:fld id="{39300388-7A7F-6140-BD31-ECC958CE6EBB}" type="datetimeFigureOut">
               <a:rPr kumimoji="1" lang="zh-TW" altLang="en-US" smtClean="0"/>
-              <a:t>2025/7/16</a:t>
+              <a:t>2025/7/17</a:t>
             </a:fld>
             <a:endParaRPr kumimoji="1" lang="zh-TW" altLang="en-US"/>
           </a:p>
@@ -1732,7 +1732,7 @@
           <a:p>
             <a:fld id="{39300388-7A7F-6140-BD31-ECC958CE6EBB}" type="datetimeFigureOut">
               <a:rPr kumimoji="1" lang="zh-TW" altLang="en-US" smtClean="0"/>
-              <a:t>2025/7/16</a:t>
+              <a:t>2025/7/17</a:t>
             </a:fld>
             <a:endParaRPr kumimoji="1" lang="zh-TW" altLang="en-US"/>
           </a:p>
@@ -2012,7 +2012,7 @@
           <a:p>
             <a:fld id="{39300388-7A7F-6140-BD31-ECC958CE6EBB}" type="datetimeFigureOut">
               <a:rPr kumimoji="1" lang="zh-TW" altLang="en-US" smtClean="0"/>
-              <a:t>2025/7/16</a:t>
+              <a:t>2025/7/17</a:t>
             </a:fld>
             <a:endParaRPr kumimoji="1" lang="zh-TW" altLang="en-US"/>
           </a:p>
@@ -2229,7 +2229,7 @@
           <a:p>
             <a:fld id="{39300388-7A7F-6140-BD31-ECC958CE6EBB}" type="datetimeFigureOut">
               <a:rPr kumimoji="1" lang="zh-TW" altLang="en-US" smtClean="0"/>
-              <a:t>2025/7/16</a:t>
+              <a:t>2025/7/17</a:t>
             </a:fld>
             <a:endParaRPr kumimoji="1" lang="zh-TW" altLang="en-US"/>
           </a:p>
@@ -2504,7 +2504,7 @@
           <a:p>
             <a:fld id="{39300388-7A7F-6140-BD31-ECC958CE6EBB}" type="datetimeFigureOut">
               <a:rPr kumimoji="1" lang="zh-TW" altLang="en-US" smtClean="0"/>
-              <a:t>2025/7/16</a:t>
+              <a:t>2025/7/17</a:t>
             </a:fld>
             <a:endParaRPr kumimoji="1" lang="zh-TW" altLang="en-US"/>
           </a:p>
@@ -2769,7 +2769,7 @@
           <a:p>
             <a:fld id="{39300388-7A7F-6140-BD31-ECC958CE6EBB}" type="datetimeFigureOut">
               <a:rPr kumimoji="1" lang="zh-TW" altLang="en-US" smtClean="0"/>
-              <a:t>2025/7/16</a:t>
+              <a:t>2025/7/17</a:t>
             </a:fld>
             <a:endParaRPr kumimoji="1" lang="zh-TW" altLang="en-US"/>
           </a:p>
@@ -3182,7 +3182,7 @@
           <a:p>
             <a:fld id="{39300388-7A7F-6140-BD31-ECC958CE6EBB}" type="datetimeFigureOut">
               <a:rPr kumimoji="1" lang="zh-TW" altLang="en-US" smtClean="0"/>
-              <a:t>2025/7/16</a:t>
+              <a:t>2025/7/17</a:t>
             </a:fld>
             <a:endParaRPr kumimoji="1" lang="zh-TW" altLang="en-US"/>
           </a:p>
@@ -3323,7 +3323,7 @@
           <a:p>
             <a:fld id="{39300388-7A7F-6140-BD31-ECC958CE6EBB}" type="datetimeFigureOut">
               <a:rPr kumimoji="1" lang="zh-TW" altLang="en-US" smtClean="0"/>
-              <a:t>2025/7/16</a:t>
+              <a:t>2025/7/17</a:t>
             </a:fld>
             <a:endParaRPr kumimoji="1" lang="zh-TW" altLang="en-US"/>
           </a:p>
@@ -3576,7 +3576,7 @@
             <a:fld id="{39300388-7A7F-6140-BD31-ECC958CE6EBB}" type="datetimeFigureOut">
               <a:rPr kumimoji="1" lang="zh-TW" altLang="en-US" smtClean="0"/>
               <a:pPr/>
-              <a:t>2025/7/16</a:t>
+              <a:t>2025/7/17</a:t>
             </a:fld>
             <a:endParaRPr kumimoji="1" lang="zh-TW" altLang="en-US"/>
           </a:p>
@@ -4075,6 +4075,18 @@
   <p:clrMapOvr>
     <a:masterClrMapping/>
   </p:clrMapOvr>
+  <mc:AlternateContent xmlns:mc="http://schemas.openxmlformats.org/markup-compatibility/2006">
+    <mc:Choice xmlns:p14="http://schemas.microsoft.com/office/powerpoint/2010/main" Requires="p14">
+      <p:transition spd="slow" p14:dur="2000">
+        <p:cut/>
+      </p:transition>
+    </mc:Choice>
+    <mc:Fallback>
+      <p:transition spd="slow">
+        <p:cut/>
+      </p:transition>
+    </mc:Fallback>
+  </mc:AlternateContent>
 </p:sld>
 </file>
 
@@ -4192,6 +4204,18 @@
   <p:clrMapOvr>
     <a:masterClrMapping/>
   </p:clrMapOvr>
+  <mc:AlternateContent xmlns:mc="http://schemas.openxmlformats.org/markup-compatibility/2006">
+    <mc:Choice xmlns:p14="http://schemas.microsoft.com/office/powerpoint/2010/main" Requires="p14">
+      <p:transition spd="slow" p14:dur="2000">
+        <p:cut/>
+      </p:transition>
+    </mc:Choice>
+    <mc:Fallback>
+      <p:transition spd="slow">
+        <p:cut/>
+      </p:transition>
+    </mc:Fallback>
+  </mc:AlternateContent>
 </p:sld>
 </file>
 
@@ -4308,6 +4332,18 @@
   <p:clrMapOvr>
     <a:masterClrMapping/>
   </p:clrMapOvr>
+  <mc:AlternateContent xmlns:mc="http://schemas.openxmlformats.org/markup-compatibility/2006">
+    <mc:Choice xmlns:p14="http://schemas.microsoft.com/office/powerpoint/2010/main" Requires="p14">
+      <p:transition spd="slow" p14:dur="2000">
+        <p:cut/>
+      </p:transition>
+    </mc:Choice>
+    <mc:Fallback>
+      <p:transition spd="slow">
+        <p:cut/>
+      </p:transition>
+    </mc:Fallback>
+  </mc:AlternateContent>
 </p:sld>
 </file>
 
@@ -4379,7 +4415,9 @@
         </p:nvSpPr>
         <p:spPr/>
         <p:txBody>
-          <a:bodyPr/>
+          <a:bodyPr>
+            <a:normAutofit fontScale="92500"/>
+          </a:bodyPr>
           <a:lstStyle/>
           <a:p>
             <a:r>
@@ -4445,6 +4483,18 @@
   <p:clrMapOvr>
     <a:masterClrMapping/>
   </p:clrMapOvr>
+  <mc:AlternateContent xmlns:mc="http://schemas.openxmlformats.org/markup-compatibility/2006">
+    <mc:Choice xmlns:p14="http://schemas.microsoft.com/office/powerpoint/2010/main" Requires="p14">
+      <p:transition spd="slow" p14:dur="2000">
+        <p:cut/>
+      </p:transition>
+    </mc:Choice>
+    <mc:Fallback>
+      <p:transition spd="slow">
+        <p:cut/>
+      </p:transition>
+    </mc:Fallback>
+  </mc:AlternateContent>
 </p:sld>
 </file>
 
@@ -4518,19 +4568,11 @@
           <a:p>
             <a:r>
               <a:rPr kumimoji="1" lang="en-US" altLang="zh-TW" dirty="0" err="1"/>
-              <a:t>Pixverse</a:t>
+              <a:t>PixVerse</a:t>
             </a:r>
             <a:r>
               <a:rPr kumimoji="1" lang="en-US" altLang="zh-TW" dirty="0"/>
-              <a:t> (https://</a:t>
-            </a:r>
-            <a:r>
-              <a:rPr kumimoji="1" lang="en-US" altLang="zh-TW" dirty="0" err="1"/>
-              <a:t>app.pixverse.ai</a:t>
-            </a:r>
-            <a:r>
-              <a:rPr kumimoji="1" lang="en-US" altLang="zh-TW" dirty="0"/>
-              <a:t>/)</a:t>
+              <a:t> (https://app.pixverse.ai/)</a:t>
             </a:r>
           </a:p>
           <a:p>
@@ -4568,6 +4610,18 @@
   <p:clrMapOvr>
     <a:masterClrMapping/>
   </p:clrMapOvr>
+  <mc:AlternateContent xmlns:mc="http://schemas.openxmlformats.org/markup-compatibility/2006">
+    <mc:Choice xmlns:p14="http://schemas.microsoft.com/office/powerpoint/2010/main" Requires="p14">
+      <p:transition spd="slow" p14:dur="2000">
+        <p:cut/>
+      </p:transition>
+    </mc:Choice>
+    <mc:Fallback>
+      <p:transition spd="slow">
+        <p:cut/>
+      </p:transition>
+    </mc:Fallback>
+  </mc:AlternateContent>
 </p:sld>
 </file>
 
@@ -4772,6 +4826,18 @@
   <p:clrMapOvr>
     <a:masterClrMapping/>
   </p:clrMapOvr>
+  <mc:AlternateContent xmlns:mc="http://schemas.openxmlformats.org/markup-compatibility/2006">
+    <mc:Choice xmlns:p14="http://schemas.microsoft.com/office/powerpoint/2010/main" Requires="p14">
+      <p:transition spd="slow" p14:dur="2000">
+        <p:cut/>
+      </p:transition>
+    </mc:Choice>
+    <mc:Fallback>
+      <p:transition spd="slow">
+        <p:cut/>
+      </p:transition>
+    </mc:Fallback>
+  </mc:AlternateContent>
 </p:sld>
 </file>
 
@@ -4861,6 +4927,18 @@
   <p:clrMapOvr>
     <a:masterClrMapping/>
   </p:clrMapOvr>
+  <mc:AlternateContent xmlns:mc="http://schemas.openxmlformats.org/markup-compatibility/2006">
+    <mc:Choice xmlns:p14="http://schemas.microsoft.com/office/powerpoint/2010/main" Requires="p14">
+      <p:transition spd="slow" p14:dur="2000">
+        <p:cut/>
+      </p:transition>
+    </mc:Choice>
+    <mc:Fallback>
+      <p:transition spd="slow">
+        <p:cut/>
+      </p:transition>
+    </mc:Fallback>
+  </mc:AlternateContent>
 </p:sld>
 </file>
 
@@ -5158,6 +5236,18 @@
   <p:clrMapOvr>
     <a:masterClrMapping/>
   </p:clrMapOvr>
+  <mc:AlternateContent xmlns:mc="http://schemas.openxmlformats.org/markup-compatibility/2006">
+    <mc:Choice xmlns:p14="http://schemas.microsoft.com/office/powerpoint/2010/main" Requires="p14">
+      <p:transition spd="slow" p14:dur="2000">
+        <p:cut/>
+      </p:transition>
+    </mc:Choice>
+    <mc:Fallback>
+      <p:transition spd="slow">
+        <p:cut/>
+      </p:transition>
+    </mc:Fallback>
+  </mc:AlternateContent>
 </p:sld>
 </file>
 
@@ -5235,6 +5325,18 @@
   <p:clrMapOvr>
     <a:masterClrMapping/>
   </p:clrMapOvr>
+  <mc:AlternateContent xmlns:mc="http://schemas.openxmlformats.org/markup-compatibility/2006">
+    <mc:Choice xmlns:p14="http://schemas.microsoft.com/office/powerpoint/2010/main" Requires="p14">
+      <p:transition spd="slow" p14:dur="2000">
+        <p:cut/>
+      </p:transition>
+    </mc:Choice>
+    <mc:Fallback>
+      <p:transition spd="slow">
+        <p:cut/>
+      </p:transition>
+    </mc:Fallback>
+  </mc:AlternateContent>
 </p:sld>
 </file>
 
@@ -5312,6 +5414,18 @@
   <p:clrMapOvr>
     <a:masterClrMapping/>
   </p:clrMapOvr>
+  <mc:AlternateContent xmlns:mc="http://schemas.openxmlformats.org/markup-compatibility/2006">
+    <mc:Choice xmlns:p14="http://schemas.microsoft.com/office/powerpoint/2010/main" Requires="p14">
+      <p:transition spd="slow" p14:dur="2000">
+        <p:cut/>
+      </p:transition>
+    </mc:Choice>
+    <mc:Fallback>
+      <p:transition spd="slow">
+        <p:cut/>
+      </p:transition>
+    </mc:Fallback>
+  </mc:AlternateContent>
 </p:sld>
 </file>
 
@@ -5647,6 +5761,18 @@
   <p:clrMapOvr>
     <a:masterClrMapping/>
   </p:clrMapOvr>
+  <mc:AlternateContent xmlns:mc="http://schemas.openxmlformats.org/markup-compatibility/2006">
+    <mc:Choice xmlns:p14="http://schemas.microsoft.com/office/powerpoint/2010/main" Requires="p14">
+      <p:transition spd="slow" p14:dur="2000">
+        <p:cut/>
+      </p:transition>
+    </mc:Choice>
+    <mc:Fallback>
+      <p:transition spd="slow">
+        <p:cut/>
+      </p:transition>
+    </mc:Fallback>
+  </mc:AlternateContent>
 </p:sld>
 </file>
 
@@ -5724,6 +5850,18 @@
   <p:clrMapOvr>
     <a:masterClrMapping/>
   </p:clrMapOvr>
+  <mc:AlternateContent xmlns:mc="http://schemas.openxmlformats.org/markup-compatibility/2006">
+    <mc:Choice xmlns:p14="http://schemas.microsoft.com/office/powerpoint/2010/main" Requires="p14">
+      <p:transition spd="slow" p14:dur="2000">
+        <p:cut/>
+      </p:transition>
+    </mc:Choice>
+    <mc:Fallback>
+      <p:transition spd="slow">
+        <p:cut/>
+      </p:transition>
+    </mc:Fallback>
+  </mc:AlternateContent>
 </p:sld>
 </file>
 
@@ -5870,6 +6008,18 @@
   <p:clrMapOvr>
     <a:masterClrMapping/>
   </p:clrMapOvr>
+  <mc:AlternateContent xmlns:mc="http://schemas.openxmlformats.org/markup-compatibility/2006">
+    <mc:Choice xmlns:p14="http://schemas.microsoft.com/office/powerpoint/2010/main" Requires="p14">
+      <p:transition spd="slow" p14:dur="2000">
+        <p:cut/>
+      </p:transition>
+    </mc:Choice>
+    <mc:Fallback>
+      <p:transition spd="slow">
+        <p:cut/>
+      </p:transition>
+    </mc:Fallback>
+  </mc:AlternateContent>
 </p:sld>
 </file>
 
@@ -6116,6 +6266,18 @@
   <p:clrMapOvr>
     <a:masterClrMapping/>
   </p:clrMapOvr>
+  <mc:AlternateContent xmlns:mc="http://schemas.openxmlformats.org/markup-compatibility/2006">
+    <mc:Choice xmlns:p14="http://schemas.microsoft.com/office/powerpoint/2010/main" Requires="p14">
+      <p:transition spd="slow" p14:dur="2000">
+        <p:cut/>
+      </p:transition>
+    </mc:Choice>
+    <mc:Fallback>
+      <p:transition spd="slow">
+        <p:cut/>
+      </p:transition>
+    </mc:Fallback>
+  </mc:AlternateContent>
 </p:sld>
 </file>
 
